--- a/branded_docs/source/Relian_Substrate_Briefing.pptx
+++ b/branded_docs/source/Relian_Substrate_Briefing.pptx
@@ -1900,7 +1900,7 @@
                 <a:ea typeface="Calibri" pitchFamily="34" charset="-122"/>
                 <a:cs typeface="Calibri" pitchFamily="34" charset="-120"/>
               </a:rPr>
-              <a:t>Internal technical briefing  ·  Prepared for Akil &amp; AJ  ·  A. K. Wooden, Sr.  ·  Visionblox LLC / Relian™  ·  Montana MAPS  SPB26-0608GW-VSNBLX</a:t>
+              <a:t>Internal technical briefing  ·  Prepared for technical leadership  ·  A. K. Wooden, Sr.  ·  Visionblox LLC / Relian™  ·  Montana MAPS  SPB26-0608GW-VSNBLX</a:t>
             </a:r>
             <a:endParaRPr lang="en-US" sz="1050" dirty="0"/>
           </a:p>
@@ -7247,7 +7247,7 @@
                 <a:ea typeface="Calibri" pitchFamily="34" charset="-122"/>
                 <a:cs typeface="Calibri" pitchFamily="34" charset="-120"/>
               </a:rPr>
-              <a:t>Akil: Track B infrastructure  ·  AJ: database  ·  Khaalis: judgment layer + key custody</a:t>
+              <a:t>Principal architect: Track B infrastructure  ·  Data engineering: database  ·  Khaalis: judgment layer + key custody</a:t>
             </a:r>
             <a:endParaRPr lang="en-US" sz="1050" dirty="0"/>
           </a:p>
